--- a/deck/Throughline_Deck.pptx
+++ b/deck/Throughline_Deck.pptx
@@ -3559,7 +3559,7 @@
               <a:defRPr sz="2000"/>
             </a:pPr>
             <a:r>
-              <a:t>High-friction customers return 5x less often than clean-journey customers</a:t>
+              <a:t>High-friction customers return 5x less often, measured against our seeded synthetic dataset</a:t>
             </a:r>
           </a:p>
         </p:txBody>
